--- a/public/downloads/iowa-co-op-keynote.pptx
+++ b/public/downloads/iowa-co-op-keynote.pptx
@@ -2466,7 +2466,7 @@
 Visible panels: Synthetic NDVI example | Synthetic scout triage example
 Panel detail:
 - Synthetic NDVI example: Synthetic NDVI anomaly line shows a late-June drop, a rain-assisted early-July recovery, and a second stress wave near pollination and early grain fill.
-- Synthetic scout triage example: Synthetic scout-priority events show where agronomist attention becomes most urgent after the stress windows appear.
+- Synthetic scout triage example: Synthetic scout-priority score rises through both stress windows, while the zone-level annotations preserve the specific handoff moments.
 Thresholds:
 - watch: &lt;= -0.04. Field variation is large enough to justify agronomist review.
 - escalate: &lt;= -0.06. Field variation is severe enough that the field should move to the top of the review queue.
